--- a/fagyibolt/Prezentációk/Fagyibolt_Tagok_Értékelése.pptx
+++ b/fagyibolt/Prezentációk/Fagyibolt_Tagok_Értékelése.pptx
@@ -131,7 +131,7 @@
 <file path=ppt/revisionInfo.xml><?xml version="1.0" encoding="utf-8"?>
 <p1510:revInfo xmlns:a="http://schemas.openxmlformats.org/drawingml/2006/main" xmlns:r="http://schemas.openxmlformats.org/officeDocument/2006/relationships" xmlns:p1510="http://schemas.microsoft.com/office/powerpoint/2015/10/main">
   <p1510:revLst>
-    <p1510:client id="{C20E6B4F-89CB-7F7F-0B08-FE92E7EE543F}" v="317" dt="2026-03-29T21:25:28.642"/>
+    <p1510:client id="{E1A1EDCA-BA8A-5495-7995-25F62001E543}" v="3" dt="2026-04-27T04:59:49.217"/>
   </p1510:revLst>
 </p1510:revInfo>
 </file>
@@ -359,7 +359,7 @@
             <a:fld id="{B61BEF0D-F0BB-DE4B-95CE-6DB70DBA9567}" type="datetimeFigureOut">
               <a:rPr lang="en-US" dirty="0"/>
               <a:pPr/>
-              <a:t>3/29/2026</a:t>
+              <a:t>4/26/2026</a:t>
             </a:fld>
             <a:endParaRPr lang="en-US" dirty="0"/>
           </a:p>
@@ -660,7 +660,7 @@
             <a:fld id="{B61BEF0D-F0BB-DE4B-95CE-6DB70DBA9567}" type="datetimeFigureOut">
               <a:rPr lang="en-US" dirty="0"/>
               <a:pPr/>
-              <a:t>3/29/2026</a:t>
+              <a:t>4/26/2026</a:t>
             </a:fld>
             <a:endParaRPr lang="en-US" dirty="0"/>
           </a:p>
@@ -939,7 +939,7 @@
             <a:fld id="{B61BEF0D-F0BB-DE4B-95CE-6DB70DBA9567}" type="datetimeFigureOut">
               <a:rPr lang="en-US" dirty="0"/>
               <a:pPr/>
-              <a:t>3/29/2026</a:t>
+              <a:t>4/26/2026</a:t>
             </a:fld>
             <a:endParaRPr lang="en-US" dirty="0"/>
           </a:p>
@@ -1510,7 +1510,7 @@
             <a:fld id="{B61BEF0D-F0BB-DE4B-95CE-6DB70DBA9567}" type="datetimeFigureOut">
               <a:rPr lang="en-US" dirty="0"/>
               <a:pPr/>
-              <a:t>3/29/2026</a:t>
+              <a:t>4/26/2026</a:t>
             </a:fld>
             <a:endParaRPr lang="en-US" dirty="0"/>
           </a:p>
@@ -1789,7 +1789,7 @@
             <a:fld id="{B61BEF0D-F0BB-DE4B-95CE-6DB70DBA9567}" type="datetimeFigureOut">
               <a:rPr lang="en-US" dirty="0"/>
               <a:pPr/>
-              <a:t>3/29/2026</a:t>
+              <a:t>4/26/2026</a:t>
             </a:fld>
             <a:endParaRPr lang="en-US" dirty="0"/>
           </a:p>
@@ -2352,7 +2352,7 @@
             <a:fld id="{B61BEF0D-F0BB-DE4B-95CE-6DB70DBA9567}" type="datetimeFigureOut">
               <a:rPr lang="en-US" dirty="0"/>
               <a:pPr/>
-              <a:t>3/29/2026</a:t>
+              <a:t>4/26/2026</a:t>
             </a:fld>
             <a:endParaRPr lang="en-US" dirty="0"/>
           </a:p>
@@ -2680,7 +2680,7 @@
             <a:fld id="{B61BEF0D-F0BB-DE4B-95CE-6DB70DBA9567}" type="datetimeFigureOut">
               <a:rPr lang="en-US" dirty="0"/>
               <a:pPr/>
-              <a:t>3/29/2026</a:t>
+              <a:t>4/26/2026</a:t>
             </a:fld>
             <a:endParaRPr lang="en-US" dirty="0"/>
           </a:p>
@@ -2891,7 +2891,7 @@
             <a:fld id="{B61BEF0D-F0BB-DE4B-95CE-6DB70DBA9567}" type="datetimeFigureOut">
               <a:rPr lang="en-US" dirty="0"/>
               <a:pPr/>
-              <a:t>3/29/2026</a:t>
+              <a:t>4/26/2026</a:t>
             </a:fld>
             <a:endParaRPr lang="en-US" dirty="0"/>
           </a:p>
@@ -3107,7 +3107,7 @@
             <a:fld id="{B61BEF0D-F0BB-DE4B-95CE-6DB70DBA9567}" type="datetimeFigureOut">
               <a:rPr lang="en-US" dirty="0"/>
               <a:pPr/>
-              <a:t>3/29/2026</a:t>
+              <a:t>4/26/2026</a:t>
             </a:fld>
             <a:endParaRPr lang="en-US" dirty="0"/>
           </a:p>
@@ -3313,7 +3313,7 @@
             <a:fld id="{B61BEF0D-F0BB-DE4B-95CE-6DB70DBA9567}" type="datetimeFigureOut">
               <a:rPr lang="en-US" dirty="0"/>
               <a:pPr/>
-              <a:t>3/29/2026</a:t>
+              <a:t>4/26/2026</a:t>
             </a:fld>
             <a:endParaRPr lang="en-US" dirty="0"/>
           </a:p>
@@ -3592,7 +3592,7 @@
             <a:fld id="{B61BEF0D-F0BB-DE4B-95CE-6DB70DBA9567}" type="datetimeFigureOut">
               <a:rPr lang="en-US" dirty="0"/>
               <a:pPr/>
-              <a:t>3/29/2026</a:t>
+              <a:t>4/26/2026</a:t>
             </a:fld>
             <a:endParaRPr lang="en-US" dirty="0"/>
           </a:p>
@@ -3857,7 +3857,7 @@
             <a:fld id="{B61BEF0D-F0BB-DE4B-95CE-6DB70DBA9567}" type="datetimeFigureOut">
               <a:rPr lang="en-US" dirty="0"/>
               <a:pPr/>
-              <a:t>3/29/2026</a:t>
+              <a:t>4/26/2026</a:t>
             </a:fld>
             <a:endParaRPr lang="en-US" dirty="0"/>
           </a:p>
@@ -4262,7 +4262,7 @@
             <a:fld id="{B61BEF0D-F0BB-DE4B-95CE-6DB70DBA9567}" type="datetimeFigureOut">
               <a:rPr lang="en-US" dirty="0"/>
               <a:pPr/>
-              <a:t>3/29/2026</a:t>
+              <a:t>4/26/2026</a:t>
             </a:fld>
             <a:endParaRPr lang="en-US" dirty="0"/>
           </a:p>
@@ -4422,7 +4422,7 @@
             <a:fld id="{B61BEF0D-F0BB-DE4B-95CE-6DB70DBA9567}" type="datetimeFigureOut">
               <a:rPr lang="en-US" dirty="0"/>
               <a:pPr/>
-              <a:t>3/29/2026</a:t>
+              <a:t>4/26/2026</a:t>
             </a:fld>
             <a:endParaRPr lang="en-US" dirty="0"/>
           </a:p>
@@ -4549,7 +4549,7 @@
             <a:fld id="{B61BEF0D-F0BB-DE4B-95CE-6DB70DBA9567}" type="datetimeFigureOut">
               <a:rPr lang="en-US" dirty="0"/>
               <a:pPr/>
-              <a:t>3/29/2026</a:t>
+              <a:t>4/26/2026</a:t>
             </a:fld>
             <a:endParaRPr lang="en-US" dirty="0"/>
           </a:p>
@@ -4834,7 +4834,7 @@
             <a:fld id="{B61BEF0D-F0BB-DE4B-95CE-6DB70DBA9567}" type="datetimeFigureOut">
               <a:rPr lang="en-US" dirty="0"/>
               <a:pPr/>
-              <a:t>3/29/2026</a:t>
+              <a:t>4/26/2026</a:t>
             </a:fld>
             <a:endParaRPr lang="en-US" dirty="0"/>
           </a:p>
@@ -5125,7 +5125,7 @@
             <a:fld id="{B61BEF0D-F0BB-DE4B-95CE-6DB70DBA9567}" type="datetimeFigureOut">
               <a:rPr lang="en-US" dirty="0"/>
               <a:pPr/>
-              <a:t>3/29/2026</a:t>
+              <a:t>4/26/2026</a:t>
             </a:fld>
             <a:endParaRPr lang="en-US" dirty="0"/>
           </a:p>
@@ -5339,7 +5339,7 @@
             <a:fld id="{B61BEF0D-F0BB-DE4B-95CE-6DB70DBA9567}" type="datetimeFigureOut">
               <a:rPr lang="en-US" dirty="0"/>
               <a:pPr/>
-              <a:t>3/29/2026</a:t>
+              <a:t>4/26/2026</a:t>
             </a:fld>
             <a:endParaRPr lang="en-US" dirty="0"/>
           </a:p>
@@ -5992,17 +5992,17 @@
           <a:p>
             <a:r>
               <a:rPr lang="hu-HU" sz="4800"/>
-              <a:t>NiCO</a:t>
+              <a:t>Nico</a:t>
             </a:r>
             <a:r>
               <a:rPr sz="4800" dirty="0"/>
               <a:t> </a:t>
             </a:r>
             <a:r>
-              <a:rPr sz="4800" err="1"/>
+              <a:rPr sz="4800" dirty="0" err="1"/>
               <a:t>munkája</a:t>
             </a:r>
-            <a:endParaRPr lang="hu-HU" sz="4800" err="1">
+            <a:endParaRPr lang="hu-HU" sz="4800" dirty="0" err="1">
               <a:ea typeface="Calibri Light"/>
               <a:cs typeface="Calibri Light"/>
             </a:endParaRPr>
